--- a/Report/Report_1015.pptx
+++ b/Report/Report_1015.pptx
@@ -8,8 +8,11 @@
     <p:notesMasterId r:id="rId4"/>
   </p:notesMasterIdLst>
   <p:sldIdLst>
-    <p:sldId id="285" r:id="rId3"/>
-    <p:sldId id="287" r:id="rId5"/>
+    <p:sldId id="288" r:id="rId3"/>
+    <p:sldId id="289" r:id="rId5"/>
+    <p:sldId id="291" r:id="rId6"/>
+    <p:sldId id="292" r:id="rId7"/>
+    <p:sldId id="293" r:id="rId8"/>
   </p:sldIdLst>
   <p:sldSz cx="9144000" cy="6858000"/>
   <p:notesSz cx="6858000" cy="9144000"/>
@@ -260,74 +263,48 @@
       <p:grpSpPr/>
       <p:sp>
         <p:nvSpPr>
-          <p:cNvPr id="2" name="幻灯片图像占位符 1"/>
-          <p:cNvSpPr>
-            <a:spLocks noGrp="1"/>
-          </p:cNvSpPr>
-          <p:nvPr>
-            <p:ph type="sldImg" idx="2"/>
+          <p:cNvPr id="2" name="Slide Image Placeholder 1"/>
+          <p:cNvSpPr>
+            <a:spLocks noGrp="1"/>
+          </p:cNvSpPr>
+          <p:nvPr>
+            <p:ph type="sldImg"/>
           </p:nvPr>
         </p:nvSpPr>
         <p:spPr/>
       </p:sp>
       <p:sp>
         <p:nvSpPr>
-          <p:cNvPr id="3" name="文本占位符 2"/>
-          <p:cNvSpPr>
-            <a:spLocks noGrp="1"/>
-          </p:cNvSpPr>
-          <p:nvPr>
-            <p:ph type="body" idx="3"/>
+          <p:cNvPr id="3" name="Notes Placeholder 2"/>
+          <p:cNvSpPr>
+            <a:spLocks noGrp="1"/>
+          </p:cNvSpPr>
+          <p:nvPr>
+            <p:ph type="body" idx="1"/>
           </p:nvPr>
         </p:nvSpPr>
         <p:spPr/>
         <p:txBody>
           <a:bodyPr/>
-          <a:p>
-            <a:r>
-              <a:rPr lang="en-US" altLang="zh-CN"/>
-              <a:t>So in my research, objective is to Replace classification models to Regression Models.</a:t>
-            </a:r>
-            <a:br>
-              <a:rPr lang="en-US" altLang="zh-CN"/>
-            </a:br>
-            <a:r>
-              <a:rPr lang="en-US" altLang="zh-CN"/>
-              <a:t>From modular approach to end to end approach to reduce </a:t>
-            </a:r>
-            <a:r>
-              <a:rPr lang="en-US" altLang="zh-CN">
-                <a:sym typeface="+mn-ea"/>
-              </a:rPr>
-              <a:t>system complexity and loss of important information</a:t>
-            </a:r>
-            <a:endParaRPr lang="en-US" altLang="zh-CN"/>
-          </a:p>
-          <a:p>
-            <a:r>
-              <a:rPr lang="en-US" altLang="zh-CN"/>
-              <a:t>RQ is to verify that can the system </a:t>
-            </a:r>
-            <a:r>
-              <a:rPr lang="en-US" altLang="zh-CN">
-                <a:ea typeface="宋体" panose="02010600030101010101" pitchFamily="2" charset="-122"/>
-                <a:sym typeface="+mn-ea"/>
-              </a:rPr>
-              <a:t>build </a:t>
-            </a:r>
-            <a:r>
-              <a:rPr lang="en-US" altLang="zh-CN"/>
-              <a:t>on an end-to-end </a:t>
-            </a:r>
-            <a:r>
-              <a:rPr lang="en-US" altLang="zh-CN">
-                <a:ea typeface="宋体" panose="02010600030101010101" pitchFamily="2" charset="-122"/>
-                <a:sym typeface="+mn-ea"/>
-              </a:rPr>
-              <a:t>approach combined with regression be successfully applied, </a:t>
-            </a:r>
-            <a:endParaRPr lang="en-US" altLang="zh-CN"/>
-          </a:p>
+          <a:lstStyle/>
+          <a:p/>
+        </p:txBody>
+      </p:sp>
+      <p:sp>
+        <p:nvSpPr>
+          <p:cNvPr id="4" name="Slide Number Placeholder 3"/>
+          <p:cNvSpPr>
+            <a:spLocks noGrp="1"/>
+          </p:cNvSpPr>
+          <p:nvPr>
+            <p:ph type="sldNum" idx="5"/>
+          </p:nvPr>
+        </p:nvSpPr>
+        <p:spPr/>
+        <p:txBody>
+          <a:bodyPr/>
+          <a:lstStyle/>
+          <a:p/>
         </p:txBody>
       </p:sp>
     </p:spTree>
@@ -339,6 +316,198 @@
 </file>
 
 <file path=ppt/notesSlides/notesSlide2.xml><?xml version="1.0" encoding="utf-8"?>
+<p:notes xmlns:a="http://schemas.openxmlformats.org/drawingml/2006/main" xmlns:r="http://schemas.openxmlformats.org/officeDocument/2006/relationships" xmlns:p="http://schemas.openxmlformats.org/presentationml/2006/main">
+  <p:cSld>
+    <p:spTree>
+      <p:nvGrpSpPr>
+        <p:cNvPr id="1" name=""/>
+        <p:cNvGrpSpPr/>
+        <p:nvPr/>
+      </p:nvGrpSpPr>
+      <p:grpSpPr/>
+      <p:sp>
+        <p:nvSpPr>
+          <p:cNvPr id="2" name="Slide Image Placeholder 1"/>
+          <p:cNvSpPr>
+            <a:spLocks noGrp="1"/>
+          </p:cNvSpPr>
+          <p:nvPr>
+            <p:ph type="sldImg"/>
+          </p:nvPr>
+        </p:nvSpPr>
+        <p:spPr/>
+      </p:sp>
+      <p:sp>
+        <p:nvSpPr>
+          <p:cNvPr id="3" name="Notes Placeholder 2"/>
+          <p:cNvSpPr>
+            <a:spLocks noGrp="1"/>
+          </p:cNvSpPr>
+          <p:nvPr>
+            <p:ph type="body" idx="1"/>
+          </p:nvPr>
+        </p:nvSpPr>
+        <p:spPr/>
+        <p:txBody>
+          <a:bodyPr/>
+          <a:lstStyle/>
+          <a:p/>
+        </p:txBody>
+      </p:sp>
+      <p:sp>
+        <p:nvSpPr>
+          <p:cNvPr id="4" name="Slide Number Placeholder 3"/>
+          <p:cNvSpPr>
+            <a:spLocks noGrp="1"/>
+          </p:cNvSpPr>
+          <p:nvPr>
+            <p:ph type="sldNum" idx="5"/>
+          </p:nvPr>
+        </p:nvSpPr>
+        <p:spPr/>
+        <p:txBody>
+          <a:bodyPr/>
+          <a:lstStyle/>
+          <a:p/>
+        </p:txBody>
+      </p:sp>
+    </p:spTree>
+  </p:cSld>
+  <p:clrMapOvr>
+    <a:masterClrMapping/>
+  </p:clrMapOvr>
+</p:notes>
+</file>
+
+<file path=ppt/notesSlides/notesSlide3.xml><?xml version="1.0" encoding="utf-8"?>
+<p:notes xmlns:a="http://schemas.openxmlformats.org/drawingml/2006/main" xmlns:r="http://schemas.openxmlformats.org/officeDocument/2006/relationships" xmlns:p="http://schemas.openxmlformats.org/presentationml/2006/main">
+  <p:cSld>
+    <p:spTree>
+      <p:nvGrpSpPr>
+        <p:cNvPr id="1" name=""/>
+        <p:cNvGrpSpPr/>
+        <p:nvPr/>
+      </p:nvGrpSpPr>
+      <p:grpSpPr/>
+      <p:sp>
+        <p:nvSpPr>
+          <p:cNvPr id="2" name="Slide Image Placeholder 1"/>
+          <p:cNvSpPr>
+            <a:spLocks noGrp="1"/>
+          </p:cNvSpPr>
+          <p:nvPr>
+            <p:ph type="sldImg"/>
+          </p:nvPr>
+        </p:nvSpPr>
+        <p:spPr/>
+      </p:sp>
+      <p:sp>
+        <p:nvSpPr>
+          <p:cNvPr id="3" name="Notes Placeholder 2"/>
+          <p:cNvSpPr>
+            <a:spLocks noGrp="1"/>
+          </p:cNvSpPr>
+          <p:nvPr>
+            <p:ph type="body" idx="1"/>
+          </p:nvPr>
+        </p:nvSpPr>
+        <p:spPr/>
+        <p:txBody>
+          <a:bodyPr/>
+          <a:lstStyle/>
+          <a:p/>
+        </p:txBody>
+      </p:sp>
+      <p:sp>
+        <p:nvSpPr>
+          <p:cNvPr id="4" name="Slide Number Placeholder 3"/>
+          <p:cNvSpPr>
+            <a:spLocks noGrp="1"/>
+          </p:cNvSpPr>
+          <p:nvPr>
+            <p:ph type="sldNum" idx="5"/>
+          </p:nvPr>
+        </p:nvSpPr>
+        <p:spPr/>
+        <p:txBody>
+          <a:bodyPr/>
+          <a:lstStyle/>
+          <a:p/>
+        </p:txBody>
+      </p:sp>
+    </p:spTree>
+  </p:cSld>
+  <p:clrMapOvr>
+    <a:masterClrMapping/>
+  </p:clrMapOvr>
+</p:notes>
+</file>
+
+<file path=ppt/notesSlides/notesSlide4.xml><?xml version="1.0" encoding="utf-8"?>
+<p:notes xmlns:a="http://schemas.openxmlformats.org/drawingml/2006/main" xmlns:r="http://schemas.openxmlformats.org/officeDocument/2006/relationships" xmlns:p="http://schemas.openxmlformats.org/presentationml/2006/main">
+  <p:cSld>
+    <p:spTree>
+      <p:nvGrpSpPr>
+        <p:cNvPr id="1" name=""/>
+        <p:cNvGrpSpPr/>
+        <p:nvPr/>
+      </p:nvGrpSpPr>
+      <p:grpSpPr/>
+      <p:sp>
+        <p:nvSpPr>
+          <p:cNvPr id="2" name="Slide Image Placeholder 1"/>
+          <p:cNvSpPr>
+            <a:spLocks noGrp="1"/>
+          </p:cNvSpPr>
+          <p:nvPr>
+            <p:ph type="sldImg"/>
+          </p:nvPr>
+        </p:nvSpPr>
+        <p:spPr/>
+      </p:sp>
+      <p:sp>
+        <p:nvSpPr>
+          <p:cNvPr id="3" name="Notes Placeholder 2"/>
+          <p:cNvSpPr>
+            <a:spLocks noGrp="1"/>
+          </p:cNvSpPr>
+          <p:nvPr>
+            <p:ph type="body" idx="1"/>
+          </p:nvPr>
+        </p:nvSpPr>
+        <p:spPr/>
+        <p:txBody>
+          <a:bodyPr/>
+          <a:lstStyle/>
+          <a:p/>
+        </p:txBody>
+      </p:sp>
+      <p:sp>
+        <p:nvSpPr>
+          <p:cNvPr id="4" name="Slide Number Placeholder 3"/>
+          <p:cNvSpPr>
+            <a:spLocks noGrp="1"/>
+          </p:cNvSpPr>
+          <p:nvPr>
+            <p:ph type="sldNum" idx="5"/>
+          </p:nvPr>
+        </p:nvSpPr>
+        <p:spPr/>
+        <p:txBody>
+          <a:bodyPr/>
+          <a:lstStyle/>
+          <a:p/>
+        </p:txBody>
+      </p:sp>
+    </p:spTree>
+  </p:cSld>
+  <p:clrMapOvr>
+    <a:masterClrMapping/>
+  </p:clrMapOvr>
+</p:notes>
+</file>
+
+<file path=ppt/notesSlides/notesSlide5.xml><?xml version="1.0" encoding="utf-8"?>
 <p:notes xmlns:a="http://schemas.openxmlformats.org/drawingml/2006/main" xmlns:r="http://schemas.openxmlformats.org/officeDocument/2006/relationships" xmlns:p="http://schemas.openxmlformats.org/presentationml/2006/main">
   <p:cSld>
     <p:spTree>
@@ -3263,547 +3432,6 @@
       <p:sp>
         <p:nvSpPr>
           <p:cNvPr id="6" name="文本框 5"/>
-          <p:cNvSpPr txBox="1"/>
-          <p:nvPr/>
-        </p:nvSpPr>
-        <p:spPr>
-          <a:xfrm>
-            <a:off x="220980" y="226695"/>
-            <a:ext cx="8717915" cy="760730"/>
-          </a:xfrm>
-          <a:prstGeom prst="rect">
-            <a:avLst/>
-          </a:prstGeom>
-          <a:noFill/>
-        </p:spPr>
-        <p:txBody>
-          <a:bodyPr wrap="square" rtlCol="0">
-            <a:noAutofit/>
-          </a:bodyPr>
-          <a:p>
-            <a:r>
-              <a:rPr lang="en-US" altLang="zh-CN" sz="3200" b="1" dirty="0"/>
-              <a:t>Research Objective </a:t>
-            </a:r>
-            <a:r>
-              <a:rPr lang="en-US" altLang="zh-CN" sz="3200" b="1" dirty="0">
-                <a:sym typeface="Avenir Heavy"/>
-              </a:rPr>
-              <a:t>&amp; Question</a:t>
-            </a:r>
-            <a:endParaRPr lang="en-US" altLang="zh-CN" sz="3200" b="1" dirty="0"/>
-          </a:p>
-          <a:p>
-            <a:endParaRPr lang="en-US" altLang="zh-CN" sz="3200" b="1">
-              <a:latin typeface="Times New Roman" panose="02020603050405020304" charset="0"/>
-              <a:ea typeface="宋体" panose="02010600030101010101" pitchFamily="2" charset="-122"/>
-              <a:cs typeface="Times New Roman" panose="02020603050405020304" charset="0"/>
-            </a:endParaRPr>
-          </a:p>
-        </p:txBody>
-      </p:sp>
-      <p:grpSp>
-        <p:nvGrpSpPr>
-          <p:cNvPr id="96" name="组合 95"/>
-          <p:cNvGrpSpPr/>
-          <p:nvPr>
-            <p:custDataLst>
-              <p:tags r:id="rId1"/>
-            </p:custDataLst>
-          </p:nvPr>
-        </p:nvGrpSpPr>
-        <p:grpSpPr>
-          <a:xfrm>
-            <a:off x="219710" y="2963545"/>
-            <a:ext cx="8630920" cy="1564005"/>
-            <a:chOff x="348" y="7526"/>
-            <a:chExt cx="13592" cy="2928"/>
-          </a:xfrm>
-        </p:grpSpPr>
-        <p:grpSp>
-          <p:nvGrpSpPr>
-            <p:cNvPr id="90" name="组合 89"/>
-            <p:cNvGrpSpPr/>
-            <p:nvPr>
-              <p:custDataLst>
-                <p:tags r:id="rId2"/>
-              </p:custDataLst>
-            </p:nvPr>
-          </p:nvGrpSpPr>
-          <p:grpSpPr>
-            <a:xfrm rot="0">
-              <a:off x="348" y="7526"/>
-              <a:ext cx="13593" cy="2929"/>
-              <a:chOff x="790" y="4952"/>
-              <a:chExt cx="3791" cy="2929"/>
-            </a:xfrm>
-          </p:grpSpPr>
-          <p:grpSp>
-            <p:nvGrpSpPr>
-              <p:cNvPr id="91" name="组合 90"/>
-              <p:cNvGrpSpPr/>
-              <p:nvPr/>
-            </p:nvGrpSpPr>
-            <p:grpSpPr>
-              <a:xfrm>
-                <a:off x="790" y="4952"/>
-                <a:ext cx="3791" cy="2929"/>
-                <a:chOff x="334" y="5920"/>
-                <a:chExt cx="5673" cy="2929"/>
-              </a:xfrm>
-            </p:grpSpPr>
-            <p:sp>
-              <p:nvSpPr>
-                <p:cNvPr id="92" name="Shape 25"/>
-                <p:cNvSpPr/>
-                <p:nvPr>
-                  <p:custDataLst>
-                    <p:tags r:id="rId3"/>
-                  </p:custDataLst>
-                </p:nvPr>
-              </p:nvSpPr>
-              <p:spPr>
-                <a:xfrm>
-                  <a:off x="334" y="6936"/>
-                  <a:ext cx="5672" cy="1913"/>
-                </a:xfrm>
-                <a:prstGeom prst="rect">
-                  <a:avLst/>
-                </a:prstGeom>
-                <a:solidFill>
-                  <a:srgbClr val="F59E0B">
-                    <a:alpha val="10000"/>
-                  </a:srgbClr>
-                </a:solidFill>
-                <a:ln w="19050">
-                  <a:solidFill>
-                    <a:srgbClr val="F59E0B"/>
-                  </a:solidFill>
-                  <a:prstDash val="solid"/>
-                </a:ln>
-              </p:spPr>
-            </p:sp>
-            <p:sp>
-              <p:nvSpPr>
-                <p:cNvPr id="93" name="Shape 26"/>
-                <p:cNvSpPr/>
-                <p:nvPr>
-                  <p:custDataLst>
-                    <p:tags r:id="rId4"/>
-                  </p:custDataLst>
-                </p:nvPr>
-              </p:nvSpPr>
-              <p:spPr>
-                <a:xfrm>
-                  <a:off x="335" y="5920"/>
-                  <a:ext cx="5672" cy="1016"/>
-                </a:xfrm>
-                <a:prstGeom prst="rect">
-                  <a:avLst/>
-                </a:prstGeom>
-                <a:solidFill>
-                  <a:srgbClr val="F59E0B"/>
-                </a:solidFill>
-                <a:ln w="19050">
-                  <a:solidFill>
-                    <a:srgbClr val="F59E0B"/>
-                  </a:solidFill>
-                  <a:prstDash val="solid"/>
-                </a:ln>
-              </p:spPr>
-            </p:sp>
-          </p:grpSp>
-          <p:sp>
-            <p:nvSpPr>
-              <p:cNvPr id="94" name="Text 27"/>
-              <p:cNvSpPr/>
-              <p:nvPr>
-                <p:custDataLst>
-                  <p:tags r:id="rId5"/>
-                </p:custDataLst>
-              </p:nvPr>
-            </p:nvSpPr>
-            <p:spPr>
-              <a:xfrm>
-                <a:off x="790" y="4952"/>
-                <a:ext cx="3790" cy="1016"/>
-              </a:xfrm>
-              <a:prstGeom prst="rect">
-                <a:avLst/>
-              </a:prstGeom>
-              <a:noFill/>
-            </p:spPr>
-            <p:txBody>
-              <a:bodyPr wrap="square" lIns="0" tIns="0" rIns="0" bIns="0" rtlCol="0" anchor="ctr"/>
-              <a:lstStyle/>
-              <a:p>
-                <a:pPr marL="0" indent="0" algn="ctr">
-                  <a:buNone/>
-                </a:pPr>
-                <a:r>
-                  <a:rPr lang="en-US" altLang="zh-CN" b="1" dirty="0">
-                    <a:sym typeface="+mn-ea"/>
-                  </a:rPr>
-                  <a:t>RQ</a:t>
-                </a:r>
-                <a:r>
-                  <a:rPr lang="en-US" altLang="zh-CN" b="1" dirty="0">
-                    <a:sym typeface="Avenir Heavy"/>
-                  </a:rPr>
-                  <a:t>1</a:t>
-                </a:r>
-                <a:endParaRPr lang="en-US" altLang="zh-CN" b="1" dirty="0"/>
-              </a:p>
-            </p:txBody>
-          </p:sp>
-        </p:grpSp>
-        <p:sp>
-          <p:nvSpPr>
-            <p:cNvPr id="95" name="文本框 94"/>
-            <p:cNvSpPr txBox="1"/>
-            <p:nvPr>
-              <p:custDataLst>
-                <p:tags r:id="rId6"/>
-              </p:custDataLst>
-            </p:nvPr>
-          </p:nvSpPr>
-          <p:spPr>
-            <a:xfrm>
-              <a:off x="348" y="8542"/>
-              <a:ext cx="13590" cy="1913"/>
-            </a:xfrm>
-            <a:prstGeom prst="rect">
-              <a:avLst/>
-            </a:prstGeom>
-            <a:noFill/>
-          </p:spPr>
-          <p:txBody>
-            <a:bodyPr wrap="square" rtlCol="0" anchor="t">
-              <a:noAutofit/>
-            </a:bodyPr>
-            <a:p>
-              <a:r>
-                <a:rPr lang="en-US" altLang="zh-CN">
-                  <a:sym typeface="+mn-ea"/>
-                </a:rPr>
-                <a:t>Is there a consistent relationship among </a:t>
-              </a:r>
-              <a:r>
-                <a:rPr kumimoji="1" lang="en-US" altLang="zh-CN" dirty="0">
-                  <a:sym typeface="+mn-ea"/>
-                </a:rPr>
-                <a:t>object apparent size</a:t>
-              </a:r>
-              <a:r>
-                <a:rPr lang="en-US" altLang="zh-CN">
-                  <a:sym typeface="+mn-ea"/>
-                </a:rPr>
-                <a:t>, fingertip aperture, and hand acceleration during reach-to-grasp movements</a:t>
-              </a:r>
-              <a:r>
-                <a:rPr lang="en-US" altLang="zh-CN">
-                  <a:ea typeface="宋体" panose="02010600030101010101" pitchFamily="2" charset="-122"/>
-                </a:rPr>
-                <a:t>?</a:t>
-              </a:r>
-              <a:endParaRPr lang="en-US" altLang="zh-CN">
-                <a:ea typeface="宋体" panose="02010600030101010101" pitchFamily="2" charset="-122"/>
-              </a:endParaRPr>
-            </a:p>
-          </p:txBody>
-        </p:sp>
-      </p:grpSp>
-      <p:sp>
-        <p:nvSpPr>
-          <p:cNvPr id="2" name="灯片编号占位符 1"/>
-          <p:cNvSpPr>
-            <a:spLocks noGrp="1"/>
-          </p:cNvSpPr>
-          <p:nvPr>
-            <p:ph type="sldNum" sz="quarter" idx="12"/>
-          </p:nvPr>
-        </p:nvSpPr>
-        <p:spPr/>
-        <p:txBody>
-          <a:bodyPr/>
-          <a:p>
-            <a:fld id="{6F00E456-75B8-4C92-99E8-A0CAB60115A8}" type="slidenum">
-              <a:rPr kumimoji="1" lang="ja-JP" altLang="en-US" smtClean="0"/>
-            </a:fld>
-            <a:endParaRPr kumimoji="1" lang="ja-JP" altLang="en-US"/>
-          </a:p>
-        </p:txBody>
-      </p:sp>
-      <p:grpSp>
-        <p:nvGrpSpPr>
-          <p:cNvPr id="3" name="组合 2"/>
-          <p:cNvGrpSpPr/>
-          <p:nvPr>
-            <p:custDataLst>
-              <p:tags r:id="rId7"/>
-            </p:custDataLst>
-          </p:nvPr>
-        </p:nvGrpSpPr>
-        <p:grpSpPr>
-          <a:xfrm>
-            <a:off x="219710" y="4939030"/>
-            <a:ext cx="8630920" cy="1564005"/>
-            <a:chOff x="348" y="7526"/>
-            <a:chExt cx="13592" cy="2928"/>
-          </a:xfrm>
-        </p:grpSpPr>
-        <p:grpSp>
-          <p:nvGrpSpPr>
-            <p:cNvPr id="4" name="组合 3"/>
-            <p:cNvGrpSpPr/>
-            <p:nvPr>
-              <p:custDataLst>
-                <p:tags r:id="rId8"/>
-              </p:custDataLst>
-            </p:nvPr>
-          </p:nvGrpSpPr>
-          <p:grpSpPr>
-            <a:xfrm rot="0">
-              <a:off x="348" y="7526"/>
-              <a:ext cx="13593" cy="2929"/>
-              <a:chOff x="790" y="4952"/>
-              <a:chExt cx="3791" cy="2929"/>
-            </a:xfrm>
-          </p:grpSpPr>
-          <p:grpSp>
-            <p:nvGrpSpPr>
-              <p:cNvPr id="5" name="组合 4"/>
-              <p:cNvGrpSpPr/>
-              <p:nvPr/>
-            </p:nvGrpSpPr>
-            <p:grpSpPr>
-              <a:xfrm>
-                <a:off x="790" y="4952"/>
-                <a:ext cx="3791" cy="2929"/>
-                <a:chOff x="334" y="5920"/>
-                <a:chExt cx="5673" cy="2929"/>
-              </a:xfrm>
-            </p:grpSpPr>
-            <p:sp>
-              <p:nvSpPr>
-                <p:cNvPr id="7" name="Shape 25"/>
-                <p:cNvSpPr/>
-                <p:nvPr>
-                  <p:custDataLst>
-                    <p:tags r:id="rId9"/>
-                  </p:custDataLst>
-                </p:nvPr>
-              </p:nvSpPr>
-              <p:spPr>
-                <a:xfrm>
-                  <a:off x="334" y="6936"/>
-                  <a:ext cx="5672" cy="1913"/>
-                </a:xfrm>
-                <a:prstGeom prst="rect">
-                  <a:avLst/>
-                </a:prstGeom>
-                <a:solidFill>
-                  <a:srgbClr val="F59E0B">
-                    <a:alpha val="10000"/>
-                  </a:srgbClr>
-                </a:solidFill>
-                <a:ln w="19050">
-                  <a:solidFill>
-                    <a:srgbClr val="F59E0B"/>
-                  </a:solidFill>
-                  <a:prstDash val="solid"/>
-                </a:ln>
-              </p:spPr>
-            </p:sp>
-            <p:sp>
-              <p:nvSpPr>
-                <p:cNvPr id="8" name="Shape 26"/>
-                <p:cNvSpPr/>
-                <p:nvPr>
-                  <p:custDataLst>
-                    <p:tags r:id="rId10"/>
-                  </p:custDataLst>
-                </p:nvPr>
-              </p:nvSpPr>
-              <p:spPr>
-                <a:xfrm>
-                  <a:off x="335" y="5920"/>
-                  <a:ext cx="5672" cy="1016"/>
-                </a:xfrm>
-                <a:prstGeom prst="rect">
-                  <a:avLst/>
-                </a:prstGeom>
-                <a:solidFill>
-                  <a:srgbClr val="F59E0B"/>
-                </a:solidFill>
-                <a:ln w="19050">
-                  <a:solidFill>
-                    <a:srgbClr val="F59E0B"/>
-                  </a:solidFill>
-                  <a:prstDash val="solid"/>
-                </a:ln>
-              </p:spPr>
-            </p:sp>
-          </p:grpSp>
-          <p:sp>
-            <p:nvSpPr>
-              <p:cNvPr id="9" name="Text 27"/>
-              <p:cNvSpPr/>
-              <p:nvPr>
-                <p:custDataLst>
-                  <p:tags r:id="rId11"/>
-                </p:custDataLst>
-              </p:nvPr>
-            </p:nvSpPr>
-            <p:spPr>
-              <a:xfrm>
-                <a:off x="790" y="4952"/>
-                <a:ext cx="3790" cy="1016"/>
-              </a:xfrm>
-              <a:prstGeom prst="rect">
-                <a:avLst/>
-              </a:prstGeom>
-              <a:noFill/>
-            </p:spPr>
-            <p:txBody>
-              <a:bodyPr wrap="square" lIns="0" tIns="0" rIns="0" bIns="0" rtlCol="0" anchor="ctr"/>
-              <a:lstStyle/>
-              <a:p>
-                <a:pPr marL="0" indent="0" algn="ctr">
-                  <a:buNone/>
-                </a:pPr>
-                <a:r>
-                  <a:rPr lang="en-US" altLang="zh-CN" b="1" dirty="0">
-                    <a:sym typeface="+mn-ea"/>
-                  </a:rPr>
-                  <a:t>RQ</a:t>
-                </a:r>
-                <a:r>
-                  <a:rPr lang="en-US" altLang="zh-CN" b="1" dirty="0">
-                    <a:sym typeface="Avenir Heavy"/>
-                  </a:rPr>
-                  <a:t>2</a:t>
-                </a:r>
-                <a:endParaRPr lang="en-US" altLang="zh-CN" b="1" dirty="0"/>
-              </a:p>
-            </p:txBody>
-          </p:sp>
-        </p:grpSp>
-        <p:sp>
-          <p:nvSpPr>
-            <p:cNvPr id="10" name="文本框 9"/>
-            <p:cNvSpPr txBox="1"/>
-            <p:nvPr>
-              <p:custDataLst>
-                <p:tags r:id="rId12"/>
-              </p:custDataLst>
-            </p:nvPr>
-          </p:nvSpPr>
-          <p:spPr>
-            <a:xfrm>
-              <a:off x="348" y="8542"/>
-              <a:ext cx="13590" cy="1913"/>
-            </a:xfrm>
-            <a:prstGeom prst="rect">
-              <a:avLst/>
-            </a:prstGeom>
-            <a:noFill/>
-          </p:spPr>
-          <p:txBody>
-            <a:bodyPr wrap="square" rtlCol="0" anchor="t">
-              <a:noAutofit/>
-            </a:bodyPr>
-            <a:p>
-              <a:r>
-                <a:rPr lang="en-US" altLang="zh-CN">
-                  <a:ea typeface="宋体" panose="02010600030101010101" pitchFamily="2" charset="-122"/>
-                </a:rPr>
-                <a:t>Can fingertip aperture during reach-to-grasp movements be predicted using object apparent size and hand acceleration?</a:t>
-              </a:r>
-              <a:endParaRPr lang="en-US" altLang="zh-CN">
-                <a:ea typeface="宋体" panose="02010600030101010101" pitchFamily="2" charset="-122"/>
-              </a:endParaRPr>
-            </a:p>
-          </p:txBody>
-        </p:sp>
-      </p:grpSp>
-      <p:sp>
-        <p:nvSpPr>
-          <p:cNvPr id="11" name="文本框 10"/>
-          <p:cNvSpPr txBox="1"/>
-          <p:nvPr/>
-        </p:nvSpPr>
-        <p:spPr>
-          <a:xfrm>
-            <a:off x="275590" y="909320"/>
-            <a:ext cx="8573135" cy="1753235"/>
-          </a:xfrm>
-          <a:prstGeom prst="rect">
-            <a:avLst/>
-          </a:prstGeom>
-          <a:noFill/>
-        </p:spPr>
-        <p:txBody>
-          <a:bodyPr wrap="square" rtlCol="0">
-            <a:spAutoFit/>
-          </a:bodyPr>
-          <a:p>
-            <a:r>
-              <a:rPr lang="en-US" altLang="zh-CN"/>
-              <a:t>During reach-to-grasp movements, finger opening/closing and hand motion are usually coordinated naturally and unconsciously.</a:t>
-            </a:r>
-            <a:endParaRPr lang="en-US" altLang="zh-CN"/>
-          </a:p>
-          <a:p>
-            <a:endParaRPr lang="en-US" altLang="zh-CN"/>
-          </a:p>
-          <a:p>
-            <a:r>
-              <a:rPr lang="en-US" altLang="zh-CN"/>
-              <a:t>This study aims to investigate the relationship among </a:t>
-            </a:r>
-            <a:r>
-              <a:rPr kumimoji="1" lang="en-US" altLang="zh-CN" dirty="0">
-                <a:sym typeface="+mn-ea"/>
-              </a:rPr>
-              <a:t>object apparent size</a:t>
-            </a:r>
-            <a:r>
-              <a:rPr lang="en-US" altLang="zh-CN"/>
-              <a:t>, fingertip aperture, and hand acceleration during grasping, and further examine whether this information can be used to predict the fingertip aperture process.</a:t>
-            </a:r>
-            <a:endParaRPr lang="en-US" altLang="zh-CN"/>
-          </a:p>
-        </p:txBody>
-      </p:sp>
-    </p:spTree>
-  </p:cSld>
-  <p:clrMapOvr>
-    <a:masterClrMapping/>
-  </p:clrMapOvr>
-  <p:timing>
-    <p:tnLst>
-      <p:par>
-        <p:cTn id="1" dur="indefinite" restart="never" nodeType="tmRoot"/>
-      </p:par>
-    </p:tnLst>
-  </p:timing>
-</p:sld>
-</file>
-
-<file path=ppt/slides/slide2.xml><?xml version="1.0" encoding="utf-8"?>
-<p:sld xmlns:a="http://schemas.openxmlformats.org/drawingml/2006/main" xmlns:r="http://schemas.openxmlformats.org/officeDocument/2006/relationships" xmlns:p="http://schemas.openxmlformats.org/presentationml/2006/main">
-  <p:cSld>
-    <p:spTree>
-      <p:nvGrpSpPr>
-        <p:cNvPr id="1" name=""/>
-        <p:cNvGrpSpPr/>
-        <p:nvPr/>
-      </p:nvGrpSpPr>
-      <p:grpSpPr/>
-      <p:sp>
-        <p:nvSpPr>
-          <p:cNvPr id="6" name="文本框 5"/>
           <p:cNvSpPr>
             <a:spLocks noGrp="1"/>
           </p:cNvSpPr>
@@ -3831,7 +3459,7 @@
                 <a:ea typeface="Times New Roman" panose="02020603050405020304"/>
                 <a:cs typeface="Times New Roman" panose="02020603050405020304"/>
               </a:rPr>
-              <a:t>Acceleration Data Optimization</a:t>
+              <a:t>Acceleration Data Processing</a:t>
             </a:r>
             <a:endParaRPr lang="en-US" altLang="zh-CN" sz="3200" b="1">
               <a:latin typeface="Times New Roman" panose="02020603050405020304"/>
@@ -3873,9 +3501,9 @@
           <p:nvPr/>
         </p:nvSpPr>
         <p:spPr>
-          <a:xfrm>
-            <a:off x="3620770" y="1706245"/>
-            <a:ext cx="1684655" cy="0"/>
+          <a:xfrm flipV="1">
+            <a:off x="3620770" y="1657350"/>
+            <a:ext cx="1205230" cy="76200"/>
           </a:xfrm>
           <a:custGeom>
             <a:avLst/>
@@ -3949,8 +3577,8 @@
         </p:nvSpPr>
         <p:spPr>
           <a:xfrm>
-            <a:off x="5413375" y="1383665"/>
-            <a:ext cx="3048000" cy="645160"/>
+            <a:off x="4933315" y="1383665"/>
+            <a:ext cx="4043045" cy="922020"/>
           </a:xfrm>
           <a:prstGeom prst="rect">
             <a:avLst/>
@@ -3963,13 +3591,78 @@
           </a:bodyPr>
           <a:p>
             <a:r>
-              <a:rPr lang="zh-CN" altLang="en-US">
-                <a:ea typeface="宋体" panose="02010600030101010101" pitchFamily="2" charset="-122"/>
+              <a:rPr lang="en-US" altLang="zh-CN">
+                <a:ea typeface="SimSun" panose="02010600030101010101" pitchFamily="2" charset="-122"/>
               </a:rPr>
-              <a:t>之前的加速度，不归零，说不通。</a:t>
-            </a:r>
-            <a:endParaRPr lang="zh-CN" altLang="en-US">
-              <a:ea typeface="宋体" panose="02010600030101010101" pitchFamily="2" charset="-122"/>
+              <a:t>The acceleration from before, did not return to zero at the end, which didn’t make sense.</a:t>
+            </a:r>
+            <a:endParaRPr lang="en-US" altLang="zh-CN">
+              <a:ea typeface="SimSun" panose="02010600030101010101" pitchFamily="2" charset="-122"/>
+            </a:endParaRPr>
+          </a:p>
+        </p:txBody>
+      </p:sp>
+      <p:sp>
+        <p:nvSpPr>
+          <p:cNvPr id="8" name="文本框 7"/>
+          <p:cNvSpPr txBox="1"/>
+          <p:nvPr/>
+        </p:nvSpPr>
+        <p:spPr>
+          <a:xfrm>
+            <a:off x="275590" y="3730625"/>
+            <a:ext cx="8522970" cy="2306955"/>
+          </a:xfrm>
+          <a:prstGeom prst="rect">
+            <a:avLst/>
+          </a:prstGeom>
+          <a:noFill/>
+        </p:spPr>
+        <p:txBody>
+          <a:bodyPr wrap="square" rtlCol="0">
+            <a:spAutoFit/>
+          </a:bodyPr>
+          <a:p>
+            <a:r>
+              <a:rPr lang="en-US" altLang="zh-CN">
+                <a:ea typeface="SimSun" panose="02010600030101010101" pitchFamily="2" charset="-122"/>
+              </a:rPr>
+              <a:t>Analysis of the cause: </a:t>
+            </a:r>
+            <a:endParaRPr lang="en-US" altLang="zh-CN">
+              <a:ea typeface="SimSun" panose="02010600030101010101" pitchFamily="2" charset="-122"/>
+            </a:endParaRPr>
+          </a:p>
+          <a:p>
+            <a:endParaRPr lang="en-US" altLang="zh-CN">
+              <a:ea typeface="SimSun" panose="02010600030101010101" pitchFamily="2" charset="-122"/>
+            </a:endParaRPr>
+          </a:p>
+          <a:p>
+            <a:r>
+              <a:rPr lang="en-US" altLang="zh-CN">
+                <a:ea typeface="SimSun" panose="02010600030101010101" pitchFamily="2" charset="-122"/>
+              </a:rPr>
+              <a:t>Previously, gravity compensation for the IMU was based only on the gravitational components measured along the three axes while the device was stationary.</a:t>
+            </a:r>
+            <a:br>
+              <a:rPr lang="en-US" altLang="zh-CN">
+                <a:ea typeface="SimSun" panose="02010600030101010101" pitchFamily="2" charset="-122"/>
+              </a:rPr>
+            </a:br>
+            <a:endParaRPr lang="en-US" altLang="zh-CN">
+              <a:ea typeface="SimSun" panose="02010600030101010101" pitchFamily="2" charset="-122"/>
+            </a:endParaRPr>
+          </a:p>
+          <a:p>
+            <a:r>
+              <a:rPr lang="en-US" altLang="zh-CN">
+                <a:ea typeface="SimSun" panose="02010600030101010101" pitchFamily="2" charset="-122"/>
+              </a:rPr>
+              <a:t>However, during grasping, the hand rotates slightly as it moves forward toward the object. This changes the gravitational components along the three axes, resulting in nonzero readings even when the hand stops moving.</a:t>
+            </a:r>
+            <a:endParaRPr lang="en-US" altLang="zh-CN">
+              <a:ea typeface="SimSun" panose="02010600030101010101" pitchFamily="2" charset="-122"/>
             </a:endParaRPr>
           </a:p>
         </p:txBody>
@@ -3989,76 +3682,1257 @@
 </p:sld>
 </file>
 
-<file path=ppt/tags/tag1.xml><?xml version="1.0" encoding="utf-8"?>
-<p:tagLst xmlns:p="http://schemas.openxmlformats.org/presentationml/2006/main">
-  <p:tag name="KSO_WM_DIAGRAM_VIRTUALLY_FRAME" val="{&quot;height&quot;:278.7,&quot;left&quot;:17.3,&quot;top&quot;:233.35,&quot;width&quot;:679.6}"/>
-</p:tagLst>
+<file path=ppt/slides/slide2.xml><?xml version="1.0" encoding="utf-8"?>
+<p:sld xmlns:a="http://schemas.openxmlformats.org/drawingml/2006/main" xmlns:r="http://schemas.openxmlformats.org/officeDocument/2006/relationships" xmlns:p="http://schemas.openxmlformats.org/presentationml/2006/main">
+  <p:cSld>
+    <p:spTree>
+      <p:nvGrpSpPr>
+        <p:cNvPr id="1" name=""/>
+        <p:cNvGrpSpPr/>
+        <p:nvPr/>
+      </p:nvGrpSpPr>
+      <p:grpSpPr/>
+      <p:sp>
+        <p:nvSpPr>
+          <p:cNvPr id="6" name="文本框 5"/>
+          <p:cNvSpPr>
+            <a:spLocks noGrp="1"/>
+          </p:cNvSpPr>
+          <p:nvPr/>
+        </p:nvSpPr>
+        <p:spPr>
+          <a:xfrm>
+            <a:off x="275590" y="226695"/>
+            <a:ext cx="8522970" cy="583565"/>
+          </a:xfrm>
+          <a:prstGeom prst="rect">
+            <a:avLst/>
+          </a:prstGeom>
+          <a:noFill/>
+        </p:spPr>
+        <p:txBody>
+          <a:bodyPr wrap="square">
+            <a:spAutoFit/>
+          </a:bodyPr>
+          <a:lstStyle/>
+          <a:p>
+            <a:r>
+              <a:rPr lang="en-US" altLang="zh-CN" sz="3200" b="1">
+                <a:latin typeface="Times New Roman" panose="02020603050405020304"/>
+                <a:ea typeface="Times New Roman" panose="02020603050405020304"/>
+                <a:cs typeface="Times New Roman" panose="02020603050405020304"/>
+              </a:rPr>
+              <a:t>Acceleration Data Processing</a:t>
+            </a:r>
+            <a:endParaRPr lang="en-US" altLang="zh-CN" sz="3200" b="1">
+              <a:latin typeface="Times New Roman" panose="02020603050405020304"/>
+              <a:ea typeface="Times New Roman" panose="02020603050405020304"/>
+              <a:cs typeface="Times New Roman" panose="02020603050405020304"/>
+            </a:endParaRPr>
+          </a:p>
+        </p:txBody>
+      </p:sp>
+      <p:pic>
+        <p:nvPicPr>
+          <p:cNvPr id="9" name="图片 8" descr="3.5cm_smooth_combined_acceleration_overlay"/>
+          <p:cNvPicPr>
+            <a:picLocks noChangeAspect="1"/>
+          </p:cNvPicPr>
+          <p:nvPr/>
+        </p:nvPicPr>
+        <p:blipFill>
+          <a:blip r:embed="rId1"/>
+          <a:srcRect t="49139" r="50632"/>
+          <a:stretch>
+            <a:fillRect/>
+          </a:stretch>
+        </p:blipFill>
+        <p:spPr>
+          <a:xfrm>
+            <a:off x="217805" y="810260"/>
+            <a:ext cx="4161155" cy="2143760"/>
+          </a:xfrm>
+          <a:prstGeom prst="rect">
+            <a:avLst/>
+          </a:prstGeom>
+        </p:spPr>
+      </p:pic>
+      <p:sp>
+        <p:nvSpPr>
+          <p:cNvPr id="10" name="文本框 9"/>
+          <p:cNvSpPr txBox="1"/>
+          <p:nvPr/>
+        </p:nvSpPr>
+        <p:spPr>
+          <a:xfrm>
+            <a:off x="4572000" y="929005"/>
+            <a:ext cx="4225925" cy="922020"/>
+          </a:xfrm>
+          <a:prstGeom prst="rect">
+            <a:avLst/>
+          </a:prstGeom>
+          <a:noFill/>
+        </p:spPr>
+        <p:txBody>
+          <a:bodyPr wrap="square" rtlCol="0">
+            <a:spAutoFit/>
+          </a:bodyPr>
+          <a:p>
+            <a:r>
+              <a:rPr lang="en-US" altLang="zh-CN"/>
+              <a:t>Then, I use the orientation angles to calculate the gravitational components along all three axes at each sampling point.</a:t>
+            </a:r>
+            <a:endParaRPr lang="en-US" altLang="zh-CN"/>
+          </a:p>
+        </p:txBody>
+      </p:sp>
+      <p:sp>
+        <p:nvSpPr>
+          <p:cNvPr id="11" name="文本框 10"/>
+          <p:cNvSpPr txBox="1"/>
+          <p:nvPr/>
+        </p:nvSpPr>
+        <p:spPr>
+          <a:xfrm>
+            <a:off x="4613275" y="2045970"/>
+            <a:ext cx="4184650" cy="645160"/>
+          </a:xfrm>
+          <a:prstGeom prst="rect">
+            <a:avLst/>
+          </a:prstGeom>
+          <a:noFill/>
+        </p:spPr>
+        <p:txBody>
+          <a:bodyPr wrap="square" rtlCol="0">
+            <a:spAutoFit/>
+          </a:bodyPr>
+          <a:p>
+            <a:r>
+              <a:rPr lang="en-US" altLang="zh-CN">
+                <a:sym typeface="+mn-ea"/>
+              </a:rPr>
+              <a:t>Then</a:t>
+            </a:r>
+            <a:r>
+              <a:rPr lang="en-US" altLang="zh-CN"/>
+              <a:t>, at the final position, the acceleration returns to its initial resting value.</a:t>
+            </a:r>
+            <a:endParaRPr lang="en-US" altLang="zh-CN"/>
+          </a:p>
+        </p:txBody>
+      </p:sp>
+      <p:sp>
+        <p:nvSpPr>
+          <p:cNvPr id="12" name="下箭头 11"/>
+          <p:cNvSpPr/>
+          <p:nvPr/>
+        </p:nvSpPr>
+        <p:spPr>
+          <a:xfrm>
+            <a:off x="4124960" y="2952750"/>
+            <a:ext cx="824230" cy="922020"/>
+          </a:xfrm>
+          <a:prstGeom prst="downArrow">
+            <a:avLst/>
+          </a:prstGeom>
+          <a:solidFill>
+            <a:srgbClr val="F59E0B"/>
+          </a:solidFill>
+          <a:ln>
+            <a:noFill/>
+            <a:tailEnd type="oval"/>
+          </a:ln>
+        </p:spPr>
+        <p:style>
+          <a:lnRef idx="2">
+            <a:schemeClr val="accent1">
+              <a:lumMod val="75000"/>
+            </a:schemeClr>
+          </a:lnRef>
+          <a:fillRef idx="1">
+            <a:schemeClr val="accent1"/>
+          </a:fillRef>
+          <a:effectRef idx="0">
+            <a:srgbClr val="FFFFFF"/>
+          </a:effectRef>
+          <a:fontRef idx="minor">
+            <a:schemeClr val="lt1"/>
+          </a:fontRef>
+        </p:style>
+        <p:txBody>
+          <a:bodyPr rtlCol="0" anchor="ctr"/>
+          <a:p>
+            <a:pPr algn="ctr"/>
+            <a:endParaRPr lang="zh-CN" altLang="en-US"/>
+          </a:p>
+        </p:txBody>
+      </p:sp>
+      <p:sp>
+        <p:nvSpPr>
+          <p:cNvPr id="14" name="文本框 13"/>
+          <p:cNvSpPr txBox="1"/>
+          <p:nvPr/>
+        </p:nvSpPr>
+        <p:spPr>
+          <a:xfrm>
+            <a:off x="3121025" y="3901440"/>
+            <a:ext cx="4090035" cy="368300"/>
+          </a:xfrm>
+          <a:prstGeom prst="rect">
+            <a:avLst/>
+          </a:prstGeom>
+          <a:noFill/>
+        </p:spPr>
+        <p:txBody>
+          <a:bodyPr wrap="square" rtlCol="0">
+            <a:spAutoFit/>
+          </a:bodyPr>
+          <a:p>
+            <a:r>
+              <a:rPr lang="en-US" altLang="zh-CN">
+                <a:ea typeface="SimSun" panose="02010600030101010101" pitchFamily="2" charset="-122"/>
+              </a:rPr>
+              <a:t>But, the results have gotten worse</a:t>
+            </a:r>
+            <a:endParaRPr lang="en-US" altLang="zh-CN">
+              <a:ea typeface="SimSun" panose="02010600030101010101" pitchFamily="2" charset="-122"/>
+            </a:endParaRPr>
+          </a:p>
+        </p:txBody>
+      </p:sp>
+      <p:pic>
+        <p:nvPicPr>
+          <p:cNvPr id="15" name="图片 14" descr="TRIAL_Size_2.5cm_20261014_093710"/>
+          <p:cNvPicPr>
+            <a:picLocks noChangeAspect="1"/>
+          </p:cNvPicPr>
+          <p:nvPr/>
+        </p:nvPicPr>
+        <p:blipFill>
+          <a:blip r:embed="rId2"/>
+          <a:stretch>
+            <a:fillRect/>
+          </a:stretch>
+        </p:blipFill>
+        <p:spPr>
+          <a:xfrm>
+            <a:off x="4010660" y="4295775"/>
+            <a:ext cx="5046980" cy="2163445"/>
+          </a:xfrm>
+          <a:prstGeom prst="rect">
+            <a:avLst/>
+          </a:prstGeom>
+        </p:spPr>
+      </p:pic>
+      <p:pic>
+        <p:nvPicPr>
+          <p:cNvPr id="17" name="图片 16" descr="overall_model_comparison"/>
+          <p:cNvPicPr>
+            <a:picLocks noChangeAspect="1"/>
+          </p:cNvPicPr>
+          <p:nvPr/>
+        </p:nvPicPr>
+        <p:blipFill>
+          <a:blip r:embed="rId3"/>
+          <a:stretch>
+            <a:fillRect/>
+          </a:stretch>
+        </p:blipFill>
+        <p:spPr>
+          <a:xfrm>
+            <a:off x="0" y="4257675"/>
+            <a:ext cx="3898900" cy="2274570"/>
+          </a:xfrm>
+          <a:prstGeom prst="rect">
+            <a:avLst/>
+          </a:prstGeom>
+        </p:spPr>
+      </p:pic>
+      <p:sp>
+        <p:nvSpPr>
+          <p:cNvPr id="18" name="文本框 17"/>
+          <p:cNvSpPr txBox="1"/>
+          <p:nvPr/>
+        </p:nvSpPr>
+        <p:spPr>
+          <a:xfrm>
+            <a:off x="0" y="6459220"/>
+            <a:ext cx="4021455" cy="275590"/>
+          </a:xfrm>
+          <a:prstGeom prst="rect">
+            <a:avLst/>
+          </a:prstGeom>
+        </p:spPr>
+        <p:txBody>
+          <a:bodyPr wrap="square">
+            <a:spAutoFit/>
+          </a:bodyPr>
+          <a:p>
+            <a:pPr algn="ctr"/>
+            <a:r>
+              <a:rPr lang="en-US" altLang="zh-CN" sz="1200"/>
+              <a:t>Overall Generalization Performance Comparison</a:t>
+            </a:r>
+            <a:endParaRPr lang="en-US" altLang="zh-CN" sz="1200"/>
+          </a:p>
+        </p:txBody>
+      </p:sp>
+      <p:sp>
+        <p:nvSpPr>
+          <p:cNvPr id="19" name="文本框 18"/>
+          <p:cNvSpPr txBox="1"/>
+          <p:nvPr/>
+        </p:nvSpPr>
+        <p:spPr>
+          <a:xfrm>
+            <a:off x="5014595" y="6459220"/>
+            <a:ext cx="3340735" cy="275590"/>
+          </a:xfrm>
+          <a:prstGeom prst="rect">
+            <a:avLst/>
+          </a:prstGeom>
+        </p:spPr>
+        <p:txBody>
+          <a:bodyPr wrap="square">
+            <a:spAutoFit/>
+          </a:bodyPr>
+          <a:p>
+            <a:r>
+              <a:rPr lang="en-US" altLang="zh-CN" sz="1200"/>
+              <a:t>Generalization Prediction Example: 25 mm Object</a:t>
+            </a:r>
+            <a:endParaRPr lang="en-US" altLang="zh-CN" sz="1200"/>
+          </a:p>
+        </p:txBody>
+      </p:sp>
+    </p:spTree>
+  </p:cSld>
+  <p:clrMapOvr>
+    <a:masterClrMapping/>
+  </p:clrMapOvr>
+  <p:timing>
+    <p:tnLst>
+      <p:par>
+        <p:cTn id="1" dur="indefinite" restart="never" nodeType="tmRoot"/>
+      </p:par>
+    </p:tnLst>
+  </p:timing>
+</p:sld>
 </file>
 
-<file path=ppt/tags/tag10.xml><?xml version="1.0" encoding="utf-8"?>
-<p:tagLst xmlns:p="http://schemas.openxmlformats.org/presentationml/2006/main">
-  <p:tag name="KSO_WM_DIAGRAM_VIRTUALLY_FRAME" val="{&quot;height&quot;:278.7,&quot;left&quot;:17.3,&quot;top&quot;:233.35,&quot;width&quot;:679.6}"/>
-</p:tagLst>
+<file path=ppt/slides/slide3.xml><?xml version="1.0" encoding="utf-8"?>
+<p:sld xmlns:a="http://schemas.openxmlformats.org/drawingml/2006/main" xmlns:r="http://schemas.openxmlformats.org/officeDocument/2006/relationships" xmlns:p="http://schemas.openxmlformats.org/presentationml/2006/main">
+  <p:cSld>
+    <p:spTree>
+      <p:nvGrpSpPr>
+        <p:cNvPr id="1" name=""/>
+        <p:cNvGrpSpPr/>
+        <p:nvPr/>
+      </p:nvGrpSpPr>
+      <p:grpSpPr/>
+      <p:sp>
+        <p:nvSpPr>
+          <p:cNvPr id="6" name="文本框 5"/>
+          <p:cNvSpPr>
+            <a:spLocks noGrp="1"/>
+          </p:cNvSpPr>
+          <p:nvPr/>
+        </p:nvSpPr>
+        <p:spPr>
+          <a:xfrm>
+            <a:off x="275590" y="226695"/>
+            <a:ext cx="8522970" cy="583565"/>
+          </a:xfrm>
+          <a:prstGeom prst="rect">
+            <a:avLst/>
+          </a:prstGeom>
+          <a:noFill/>
+        </p:spPr>
+        <p:txBody>
+          <a:bodyPr wrap="square">
+            <a:spAutoFit/>
+          </a:bodyPr>
+          <a:lstStyle/>
+          <a:p>
+            <a:r>
+              <a:rPr lang="en-US" altLang="zh-CN" sz="3200" b="1">
+                <a:latin typeface="Times New Roman" panose="02020603050405020304"/>
+                <a:ea typeface="Times New Roman" panose="02020603050405020304"/>
+                <a:cs typeface="Times New Roman" panose="02020603050405020304"/>
+              </a:rPr>
+              <a:t>Acceleration Data Processing</a:t>
+            </a:r>
+            <a:endParaRPr lang="en-US" altLang="zh-CN" sz="3200" b="1">
+              <a:latin typeface="Times New Roman" panose="02020603050405020304"/>
+              <a:ea typeface="Times New Roman" panose="02020603050405020304"/>
+              <a:cs typeface="Times New Roman" panose="02020603050405020304"/>
+            </a:endParaRPr>
+          </a:p>
+        </p:txBody>
+      </p:sp>
+      <p:pic>
+        <p:nvPicPr>
+          <p:cNvPr id="2" name="图片 1" descr="TRIAL_Size_4.5cm_20261013_105718"/>
+          <p:cNvPicPr>
+            <a:picLocks noChangeAspect="1"/>
+          </p:cNvPicPr>
+          <p:nvPr/>
+        </p:nvPicPr>
+        <p:blipFill>
+          <a:blip r:embed="rId1"/>
+          <a:stretch>
+            <a:fillRect/>
+          </a:stretch>
+        </p:blipFill>
+        <p:spPr>
+          <a:xfrm>
+            <a:off x="0" y="997585"/>
+            <a:ext cx="5639435" cy="2416810"/>
+          </a:xfrm>
+          <a:prstGeom prst="rect">
+            <a:avLst/>
+          </a:prstGeom>
+        </p:spPr>
+      </p:pic>
+      <p:pic>
+        <p:nvPicPr>
+          <p:cNvPr id="4" name="图片 3" descr="TRIAL_Size_3.5cm_20261013_131353"/>
+          <p:cNvPicPr>
+            <a:picLocks noChangeAspect="1"/>
+          </p:cNvPicPr>
+          <p:nvPr/>
+        </p:nvPicPr>
+        <p:blipFill>
+          <a:blip r:embed="rId2"/>
+          <a:stretch>
+            <a:fillRect/>
+          </a:stretch>
+        </p:blipFill>
+        <p:spPr>
+          <a:xfrm>
+            <a:off x="0" y="3514090"/>
+            <a:ext cx="5639435" cy="2417445"/>
+          </a:xfrm>
+          <a:prstGeom prst="rect">
+            <a:avLst/>
+          </a:prstGeom>
+        </p:spPr>
+      </p:pic>
+      <p:sp>
+        <p:nvSpPr>
+          <p:cNvPr id="7" name="任意多边形 6"/>
+          <p:cNvSpPr/>
+          <p:nvPr/>
+        </p:nvSpPr>
+        <p:spPr>
+          <a:xfrm>
+            <a:off x="3630930" y="1584960"/>
+            <a:ext cx="2229485" cy="85090"/>
+          </a:xfrm>
+          <a:custGeom>
+            <a:avLst/>
+            <a:gdLst>
+              <a:gd name="connisteX0" fmla="*/ 0 w 2690495"/>
+              <a:gd name="connsiteY0" fmla="*/ 0 h 0"/>
+              <a:gd name="connisteX1" fmla="*/ 2690495 w 2690495"/>
+              <a:gd name="connsiteY1" fmla="*/ 0 h 0"/>
+            </a:gdLst>
+            <a:ahLst/>
+            <a:cxnLst>
+              <a:cxn ang="0">
+                <a:pos x="connisteX0" y="connsiteY0"/>
+              </a:cxn>
+              <a:cxn ang="0">
+                <a:pos x="connisteX1" y="connsiteY1"/>
+              </a:cxn>
+            </a:cxnLst>
+            <a:rect l="l" t="t" r="r" b="b"/>
+            <a:pathLst>
+              <a:path w="2690495">
+                <a:moveTo>
+                  <a:pt x="0" y="0"/>
+                </a:moveTo>
+                <a:lnTo>
+                  <a:pt x="2690495" y="0"/>
+                </a:lnTo>
+              </a:path>
+            </a:pathLst>
+          </a:custGeom>
+          <a:noFill/>
+          <a:ln>
+            <a:solidFill>
+              <a:schemeClr val="tx1">
+                <a:lumMod val="85000"/>
+                <a:lumOff val="15000"/>
+              </a:schemeClr>
+            </a:solidFill>
+            <a:tailEnd type="oval"/>
+          </a:ln>
+        </p:spPr>
+        <p:style>
+          <a:lnRef idx="2">
+            <a:schemeClr val="accent1">
+              <a:lumMod val="75000"/>
+            </a:schemeClr>
+          </a:lnRef>
+          <a:fillRef idx="1">
+            <a:schemeClr val="accent1"/>
+          </a:fillRef>
+          <a:effectRef idx="0">
+            <a:srgbClr val="FFFFFF"/>
+          </a:effectRef>
+          <a:fontRef idx="minor">
+            <a:schemeClr val="lt1"/>
+          </a:fontRef>
+        </p:style>
+        <p:txBody>
+          <a:bodyPr rtlCol="0" anchor="ctr"/>
+          <a:p>
+            <a:pPr algn="ctr"/>
+            <a:endParaRPr lang="zh-CN" altLang="en-US"/>
+          </a:p>
+        </p:txBody>
+      </p:sp>
+      <p:sp>
+        <p:nvSpPr>
+          <p:cNvPr id="8" name="任意多边形 7"/>
+          <p:cNvSpPr/>
+          <p:nvPr/>
+        </p:nvSpPr>
+        <p:spPr>
+          <a:xfrm>
+            <a:off x="3630930" y="4131310"/>
+            <a:ext cx="2229485" cy="85090"/>
+          </a:xfrm>
+          <a:custGeom>
+            <a:avLst/>
+            <a:gdLst>
+              <a:gd name="connisteX0" fmla="*/ 0 w 2690495"/>
+              <a:gd name="connsiteY0" fmla="*/ 0 h 0"/>
+              <a:gd name="connisteX1" fmla="*/ 2690495 w 2690495"/>
+              <a:gd name="connsiteY1" fmla="*/ 0 h 0"/>
+            </a:gdLst>
+            <a:ahLst/>
+            <a:cxnLst>
+              <a:cxn ang="0">
+                <a:pos x="connisteX0" y="connsiteY0"/>
+              </a:cxn>
+              <a:cxn ang="0">
+                <a:pos x="connisteX1" y="connsiteY1"/>
+              </a:cxn>
+            </a:cxnLst>
+            <a:rect l="l" t="t" r="r" b="b"/>
+            <a:pathLst>
+              <a:path w="2690495">
+                <a:moveTo>
+                  <a:pt x="0" y="0"/>
+                </a:moveTo>
+                <a:lnTo>
+                  <a:pt x="2690495" y="0"/>
+                </a:lnTo>
+              </a:path>
+            </a:pathLst>
+          </a:custGeom>
+          <a:noFill/>
+          <a:ln>
+            <a:solidFill>
+              <a:schemeClr val="tx1">
+                <a:lumMod val="85000"/>
+                <a:lumOff val="15000"/>
+              </a:schemeClr>
+            </a:solidFill>
+            <a:tailEnd type="oval"/>
+          </a:ln>
+        </p:spPr>
+        <p:style>
+          <a:lnRef idx="2">
+            <a:schemeClr val="accent1">
+              <a:lumMod val="75000"/>
+            </a:schemeClr>
+          </a:lnRef>
+          <a:fillRef idx="1">
+            <a:schemeClr val="accent1"/>
+          </a:fillRef>
+          <a:effectRef idx="0">
+            <a:srgbClr val="FFFFFF"/>
+          </a:effectRef>
+          <a:fontRef idx="minor">
+            <a:schemeClr val="lt1"/>
+          </a:fontRef>
+        </p:style>
+        <p:txBody>
+          <a:bodyPr rtlCol="0" anchor="ctr"/>
+          <a:p>
+            <a:pPr algn="ctr"/>
+            <a:endParaRPr lang="zh-CN" altLang="en-US"/>
+          </a:p>
+        </p:txBody>
+      </p:sp>
+      <p:sp>
+        <p:nvSpPr>
+          <p:cNvPr id="13" name="文本框 12"/>
+          <p:cNvSpPr txBox="1"/>
+          <p:nvPr/>
+        </p:nvSpPr>
+        <p:spPr>
+          <a:xfrm>
+            <a:off x="5959475" y="1166495"/>
+            <a:ext cx="3048000" cy="5354320"/>
+          </a:xfrm>
+          <a:prstGeom prst="rect">
+            <a:avLst/>
+          </a:prstGeom>
+          <a:noFill/>
+        </p:spPr>
+        <p:txBody>
+          <a:bodyPr wrap="square" rtlCol="0">
+            <a:spAutoFit/>
+          </a:bodyPr>
+          <a:p>
+            <a:r>
+              <a:rPr lang="en-US" altLang="zh-CN"/>
+              <a:t>Analysis of the cause:</a:t>
+            </a:r>
+            <a:endParaRPr lang="en-US" altLang="zh-CN"/>
+          </a:p>
+          <a:p>
+            <a:br>
+              <a:rPr lang="zh-CN" altLang="en-US"/>
+            </a:br>
+            <a:r>
+              <a:rPr lang="en-US" altLang="zh-CN"/>
+              <a:t>Most predictions show multiple peaks,</a:t>
+            </a:r>
+            <a:endParaRPr lang="en-US" altLang="zh-CN"/>
+          </a:p>
+          <a:p>
+            <a:r>
+              <a:rPr lang="en-US" altLang="zh-CN"/>
+              <a:t>during the opening and closing phases.</a:t>
+            </a:r>
+            <a:br>
+              <a:rPr lang="zh-CN" altLang="en-US"/>
+            </a:br>
+            <a:endParaRPr lang="zh-CN" altLang="en-US"/>
+          </a:p>
+          <a:p>
+            <a:endParaRPr lang="zh-CN" altLang="en-US"/>
+          </a:p>
+          <a:p>
+            <a:r>
+              <a:rPr lang="en-US" altLang="zh-CN"/>
+              <a:t>The current acceleration pattern has two peaks: one during acceleration and one during deceleration. However, the MLP’s 15-frame temporal window only takes the values from the preceding 14 frames as input. I suspect that these successive acceleration peaks may be causing this prediction pattern.</a:t>
+            </a:r>
+            <a:endParaRPr lang="en-US" altLang="zh-CN"/>
+          </a:p>
+        </p:txBody>
+      </p:sp>
+    </p:spTree>
+  </p:cSld>
+  <p:clrMapOvr>
+    <a:masterClrMapping/>
+  </p:clrMapOvr>
+  <p:timing>
+    <p:tnLst>
+      <p:par>
+        <p:cTn id="1" dur="indefinite" restart="never" nodeType="tmRoot"/>
+      </p:par>
+    </p:tnLst>
+  </p:timing>
+</p:sld>
 </file>
 
-<file path=ppt/tags/tag11.xml><?xml version="1.0" encoding="utf-8"?>
-<p:tagLst xmlns:p="http://schemas.openxmlformats.org/presentationml/2006/main">
-  <p:tag name="KSO_WM_DIAGRAM_VIRTUALLY_FRAME" val="{&quot;height&quot;:278.7,&quot;left&quot;:17.3,&quot;top&quot;:233.35,&quot;width&quot;:679.6}"/>
-</p:tagLst>
+<file path=ppt/slides/slide4.xml><?xml version="1.0" encoding="utf-8"?>
+<p:sld xmlns:a="http://schemas.openxmlformats.org/drawingml/2006/main" xmlns:r="http://schemas.openxmlformats.org/officeDocument/2006/relationships" xmlns:p="http://schemas.openxmlformats.org/presentationml/2006/main">
+  <p:cSld>
+    <p:spTree>
+      <p:nvGrpSpPr>
+        <p:cNvPr id="1" name=""/>
+        <p:cNvGrpSpPr/>
+        <p:nvPr/>
+      </p:nvGrpSpPr>
+      <p:grpSpPr/>
+      <p:sp>
+        <p:nvSpPr>
+          <p:cNvPr id="6" name="文本框 5"/>
+          <p:cNvSpPr>
+            <a:spLocks noGrp="1"/>
+          </p:cNvSpPr>
+          <p:nvPr/>
+        </p:nvSpPr>
+        <p:spPr>
+          <a:xfrm>
+            <a:off x="275590" y="226695"/>
+            <a:ext cx="8522970" cy="583565"/>
+          </a:xfrm>
+          <a:prstGeom prst="rect">
+            <a:avLst/>
+          </a:prstGeom>
+          <a:noFill/>
+        </p:spPr>
+        <p:txBody>
+          <a:bodyPr wrap="square">
+            <a:spAutoFit/>
+          </a:bodyPr>
+          <a:lstStyle/>
+          <a:p>
+            <a:r>
+              <a:rPr lang="en-US" altLang="zh-CN" sz="3200" b="1">
+                <a:latin typeface="Times New Roman" panose="02020603050405020304"/>
+                <a:ea typeface="Times New Roman" panose="02020603050405020304"/>
+                <a:cs typeface="Times New Roman" panose="02020603050405020304"/>
+              </a:rPr>
+              <a:t>Acceleration Data Processing</a:t>
+            </a:r>
+            <a:endParaRPr lang="en-US" altLang="zh-CN" sz="3200" b="1">
+              <a:latin typeface="Times New Roman" panose="02020603050405020304"/>
+              <a:ea typeface="Times New Roman" panose="02020603050405020304"/>
+              <a:cs typeface="Times New Roman" panose="02020603050405020304"/>
+            </a:endParaRPr>
+          </a:p>
+        </p:txBody>
+      </p:sp>
+      <p:pic>
+        <p:nvPicPr>
+          <p:cNvPr id="3" name="图片 2" descr="overlay"/>
+          <p:cNvPicPr>
+            <a:picLocks noChangeAspect="1"/>
+          </p:cNvPicPr>
+          <p:nvPr/>
+        </p:nvPicPr>
+        <p:blipFill>
+          <a:blip r:embed="rId1"/>
+          <a:srcRect t="50007" r="50000"/>
+          <a:stretch>
+            <a:fillRect/>
+          </a:stretch>
+        </p:blipFill>
+        <p:spPr>
+          <a:xfrm>
+            <a:off x="275590" y="1160780"/>
+            <a:ext cx="4572000" cy="2268220"/>
+          </a:xfrm>
+          <a:prstGeom prst="rect">
+            <a:avLst/>
+          </a:prstGeom>
+        </p:spPr>
+      </p:pic>
+      <p:sp>
+        <p:nvSpPr>
+          <p:cNvPr id="9" name="文本框 8"/>
+          <p:cNvSpPr txBox="1"/>
+          <p:nvPr/>
+        </p:nvSpPr>
+        <p:spPr>
+          <a:xfrm>
+            <a:off x="5175885" y="946785"/>
+            <a:ext cx="3786505" cy="2061210"/>
+          </a:xfrm>
+          <a:prstGeom prst="rect">
+            <a:avLst/>
+          </a:prstGeom>
+          <a:noFill/>
+        </p:spPr>
+        <p:txBody>
+          <a:bodyPr wrap="square" rtlCol="0">
+            <a:spAutoFit/>
+          </a:bodyPr>
+          <a:p>
+            <a:r>
+              <a:rPr lang="en-US" altLang="zh-CN" sz="1600">
+                <a:ea typeface="SimSun" panose="02010600030101010101" pitchFamily="2" charset="-122"/>
+              </a:rPr>
+              <a:t>Proposed solution: Add directional information to the acceleration to distinguish acceleration from deceleration.</a:t>
+            </a:r>
+            <a:endParaRPr lang="en-US" altLang="zh-CN" sz="1600">
+              <a:ea typeface="SimSun" panose="02010600030101010101" pitchFamily="2" charset="-122"/>
+            </a:endParaRPr>
+          </a:p>
+          <a:p>
+            <a:endParaRPr lang="en-US" altLang="zh-CN" sz="1600">
+              <a:ea typeface="SimSun" panose="02010600030101010101" pitchFamily="2" charset="-122"/>
+            </a:endParaRPr>
+          </a:p>
+          <a:p>
+            <a:r>
+              <a:rPr lang="en-US" altLang="zh-CN" sz="1600">
+                <a:ea typeface="SimSun" panose="02010600030101010101" pitchFamily="2" charset="-122"/>
+              </a:rPr>
+              <a:t>Implementation: Similar to the IMU calibration during the initial phase, record one hand movement toward the object </a:t>
+            </a:r>
+            <a:r>
+              <a:rPr lang="en-US" altLang="zh-CN" sz="1600">
+                <a:ea typeface="SimSun" panose="02010600030101010101" pitchFamily="2" charset="-122"/>
+                <a:sym typeface="+mn-ea"/>
+              </a:rPr>
+              <a:t>during the initial phase</a:t>
+            </a:r>
+            <a:r>
+              <a:rPr lang="en-US" altLang="zh-CN" sz="1600">
+                <a:ea typeface="SimSun" panose="02010600030101010101" pitchFamily="2" charset="-122"/>
+              </a:rPr>
+              <a:t>.</a:t>
+            </a:r>
+            <a:endParaRPr lang="en-US" altLang="zh-CN" sz="1600">
+              <a:ea typeface="SimSun" panose="02010600030101010101" pitchFamily="2" charset="-122"/>
+            </a:endParaRPr>
+          </a:p>
+        </p:txBody>
+      </p:sp>
+      <p:sp>
+        <p:nvSpPr>
+          <p:cNvPr id="12" name="下箭头 11"/>
+          <p:cNvSpPr/>
+          <p:nvPr/>
+        </p:nvSpPr>
+        <p:spPr>
+          <a:xfrm>
+            <a:off x="4284345" y="3401060"/>
+            <a:ext cx="824230" cy="584200"/>
+          </a:xfrm>
+          <a:prstGeom prst="downArrow">
+            <a:avLst/>
+          </a:prstGeom>
+          <a:solidFill>
+            <a:srgbClr val="F59E0B"/>
+          </a:solidFill>
+          <a:ln>
+            <a:noFill/>
+            <a:tailEnd type="oval"/>
+          </a:ln>
+        </p:spPr>
+        <p:style>
+          <a:lnRef idx="2">
+            <a:schemeClr val="accent1">
+              <a:lumMod val="75000"/>
+            </a:schemeClr>
+          </a:lnRef>
+          <a:fillRef idx="1">
+            <a:schemeClr val="accent1"/>
+          </a:fillRef>
+          <a:effectRef idx="0">
+            <a:srgbClr val="FFFFFF"/>
+          </a:effectRef>
+          <a:fontRef idx="minor">
+            <a:schemeClr val="lt1"/>
+          </a:fontRef>
+        </p:style>
+        <p:txBody>
+          <a:bodyPr rtlCol="0" anchor="ctr"/>
+          <a:p>
+            <a:pPr algn="ctr"/>
+            <a:endParaRPr lang="zh-CN" altLang="en-US"/>
+          </a:p>
+        </p:txBody>
+      </p:sp>
+      <p:pic>
+        <p:nvPicPr>
+          <p:cNvPr id="10" name="图片 9" descr="generalization_model_comparison"/>
+          <p:cNvPicPr>
+            <a:picLocks noChangeAspect="1"/>
+          </p:cNvPicPr>
+          <p:nvPr/>
+        </p:nvPicPr>
+        <p:blipFill>
+          <a:blip r:embed="rId2"/>
+          <a:stretch>
+            <a:fillRect/>
+          </a:stretch>
+        </p:blipFill>
+        <p:spPr>
+          <a:xfrm>
+            <a:off x="149225" y="4236085"/>
+            <a:ext cx="4009390" cy="2339340"/>
+          </a:xfrm>
+          <a:prstGeom prst="rect">
+            <a:avLst/>
+          </a:prstGeom>
+        </p:spPr>
+      </p:pic>
+      <p:sp>
+        <p:nvSpPr>
+          <p:cNvPr id="18" name="文本框 17"/>
+          <p:cNvSpPr txBox="1"/>
+          <p:nvPr/>
+        </p:nvSpPr>
+        <p:spPr>
+          <a:xfrm>
+            <a:off x="121920" y="6476365"/>
+            <a:ext cx="4017010" cy="275590"/>
+          </a:xfrm>
+          <a:prstGeom prst="rect">
+            <a:avLst/>
+          </a:prstGeom>
+        </p:spPr>
+        <p:txBody>
+          <a:bodyPr wrap="square">
+            <a:spAutoFit/>
+          </a:bodyPr>
+          <a:p>
+            <a:pPr algn="ctr"/>
+            <a:r>
+              <a:rPr lang="en-US" altLang="zh-CN" sz="1200"/>
+              <a:t>Overall Generalization Performance Comparison</a:t>
+            </a:r>
+            <a:endParaRPr lang="en-US" altLang="zh-CN" sz="1200"/>
+          </a:p>
+        </p:txBody>
+      </p:sp>
+      <p:sp>
+        <p:nvSpPr>
+          <p:cNvPr id="19" name="文本框 18"/>
+          <p:cNvSpPr txBox="1"/>
+          <p:nvPr/>
+        </p:nvSpPr>
+        <p:spPr>
+          <a:xfrm>
+            <a:off x="4639310" y="6540500"/>
+            <a:ext cx="3869055" cy="275590"/>
+          </a:xfrm>
+          <a:prstGeom prst="rect">
+            <a:avLst/>
+          </a:prstGeom>
+        </p:spPr>
+        <p:txBody>
+          <a:bodyPr wrap="square">
+            <a:spAutoFit/>
+          </a:bodyPr>
+          <a:p>
+            <a:pPr algn="ctr"/>
+            <a:r>
+              <a:rPr lang="en-US" altLang="zh-CN" sz="1200">
+                <a:sym typeface="+mn-ea"/>
+              </a:rPr>
+              <a:t>Overall Training Sample Test Performance Comparison</a:t>
+            </a:r>
+            <a:endParaRPr lang="en-US" altLang="zh-CN" sz="1200"/>
+          </a:p>
+        </p:txBody>
+      </p:sp>
+      <p:sp>
+        <p:nvSpPr>
+          <p:cNvPr id="14" name="任意多边形 13"/>
+          <p:cNvSpPr/>
+          <p:nvPr/>
+        </p:nvSpPr>
+        <p:spPr>
+          <a:xfrm>
+            <a:off x="3088005" y="1666240"/>
+            <a:ext cx="2020570" cy="0"/>
+          </a:xfrm>
+          <a:custGeom>
+            <a:avLst/>
+            <a:gdLst>
+              <a:gd name="connisteX0" fmla="*/ 0 w 2020570"/>
+              <a:gd name="connsiteY0" fmla="*/ 0 h 0"/>
+              <a:gd name="connisteX1" fmla="*/ 2020570 w 2020570"/>
+              <a:gd name="connsiteY1" fmla="*/ 0 h 0"/>
+            </a:gdLst>
+            <a:ahLst/>
+            <a:cxnLst>
+              <a:cxn ang="0">
+                <a:pos x="connisteX0" y="connsiteY0"/>
+              </a:cxn>
+              <a:cxn ang="0">
+                <a:pos x="connisteX1" y="connsiteY1"/>
+              </a:cxn>
+            </a:cxnLst>
+            <a:rect l="l" t="t" r="r" b="b"/>
+            <a:pathLst>
+              <a:path w="2020570">
+                <a:moveTo>
+                  <a:pt x="0" y="0"/>
+                </a:moveTo>
+                <a:lnTo>
+                  <a:pt x="2020570" y="0"/>
+                </a:lnTo>
+              </a:path>
+            </a:pathLst>
+          </a:custGeom>
+          <a:noFill/>
+          <a:ln>
+            <a:solidFill>
+              <a:schemeClr val="tx1">
+                <a:lumMod val="85000"/>
+                <a:lumOff val="15000"/>
+              </a:schemeClr>
+            </a:solidFill>
+            <a:tailEnd type="oval"/>
+          </a:ln>
+        </p:spPr>
+        <p:style>
+          <a:lnRef idx="2">
+            <a:schemeClr val="accent1">
+              <a:lumMod val="75000"/>
+            </a:schemeClr>
+          </a:lnRef>
+          <a:fillRef idx="1">
+            <a:schemeClr val="accent1"/>
+          </a:fillRef>
+          <a:effectRef idx="0">
+            <a:srgbClr val="FFFFFF"/>
+          </a:effectRef>
+          <a:fontRef idx="minor">
+            <a:schemeClr val="lt1"/>
+          </a:fontRef>
+        </p:style>
+        <p:txBody>
+          <a:bodyPr rtlCol="0" anchor="ctr"/>
+          <a:p>
+            <a:pPr algn="ctr"/>
+            <a:endParaRPr lang="zh-CN" altLang="en-US"/>
+          </a:p>
+        </p:txBody>
+      </p:sp>
+      <p:sp>
+        <p:nvSpPr>
+          <p:cNvPr id="15" name="文本框 14"/>
+          <p:cNvSpPr txBox="1"/>
+          <p:nvPr/>
+        </p:nvSpPr>
+        <p:spPr>
+          <a:xfrm>
+            <a:off x="2296160" y="3943668"/>
+            <a:ext cx="5080000" cy="337185"/>
+          </a:xfrm>
+          <a:prstGeom prst="rect">
+            <a:avLst/>
+          </a:prstGeom>
+        </p:spPr>
+        <p:txBody>
+          <a:bodyPr>
+            <a:spAutoFit/>
+          </a:bodyPr>
+          <a:p>
+            <a:pPr algn="ctr"/>
+            <a:r>
+              <a:rPr lang="en-US" altLang="zh-CN" sz="1600"/>
+              <a:t>The results improved, The predictions became more stable.</a:t>
+            </a:r>
+            <a:endParaRPr lang="en-US" altLang="zh-CN" sz="1600"/>
+          </a:p>
+        </p:txBody>
+      </p:sp>
+      <p:pic>
+        <p:nvPicPr>
+          <p:cNvPr id="16" name="图片 15" descr="test_model_comparison"/>
+          <p:cNvPicPr>
+            <a:picLocks noChangeAspect="1"/>
+          </p:cNvPicPr>
+          <p:nvPr/>
+        </p:nvPicPr>
+        <p:blipFill>
+          <a:blip r:embed="rId3"/>
+          <a:stretch>
+            <a:fillRect/>
+          </a:stretch>
+        </p:blipFill>
+        <p:spPr>
+          <a:xfrm>
+            <a:off x="4638675" y="4281170"/>
+            <a:ext cx="3869690" cy="2257425"/>
+          </a:xfrm>
+          <a:prstGeom prst="rect">
+            <a:avLst/>
+          </a:prstGeom>
+        </p:spPr>
+      </p:pic>
+    </p:spTree>
+  </p:cSld>
+  <p:clrMapOvr>
+    <a:masterClrMapping/>
+  </p:clrMapOvr>
+  <p:timing>
+    <p:tnLst>
+      <p:par>
+        <p:cTn id="1" dur="indefinite" restart="never" nodeType="tmRoot"/>
+      </p:par>
+    </p:tnLst>
+  </p:timing>
+</p:sld>
 </file>
 
-<file path=ppt/tags/tag12.xml><?xml version="1.0" encoding="utf-8"?>
-<p:tagLst xmlns:p="http://schemas.openxmlformats.org/presentationml/2006/main">
-  <p:tag name="KSO_WM_DIAGRAM_VIRTUALLY_FRAME" val="{&quot;height&quot;:278.7,&quot;left&quot;:17.3,&quot;top&quot;:233.35,&quot;width&quot;:679.6}"/>
-</p:tagLst>
-</file>
-
-<file path=ppt/tags/tag2.xml><?xml version="1.0" encoding="utf-8"?>
-<p:tagLst xmlns:p="http://schemas.openxmlformats.org/presentationml/2006/main">
-  <p:tag name="KSO_WM_DIAGRAM_VIRTUALLY_FRAME" val="{&quot;height&quot;:275.65,&quot;left&quot;:17.5,&quot;top&quot;:193.7,&quot;width&quot;:687.2}"/>
-</p:tagLst>
-</file>
-
-<file path=ppt/tags/tag3.xml><?xml version="1.0" encoding="utf-8"?>
-<p:tagLst xmlns:p="http://schemas.openxmlformats.org/presentationml/2006/main">
-  <p:tag name="KSO_WM_DIAGRAM_VIRTUALLY_FRAME" val="{&quot;height&quot;:278.7,&quot;left&quot;:17.3,&quot;top&quot;:233.35,&quot;width&quot;:679.6}"/>
-</p:tagLst>
-</file>
-
-<file path=ppt/tags/tag4.xml><?xml version="1.0" encoding="utf-8"?>
-<p:tagLst xmlns:p="http://schemas.openxmlformats.org/presentationml/2006/main">
-  <p:tag name="KSO_WM_DIAGRAM_VIRTUALLY_FRAME" val="{&quot;height&quot;:278.7,&quot;left&quot;:17.3,&quot;top&quot;:233.35,&quot;width&quot;:679.6}"/>
-</p:tagLst>
-</file>
-
-<file path=ppt/tags/tag5.xml><?xml version="1.0" encoding="utf-8"?>
-<p:tagLst xmlns:p="http://schemas.openxmlformats.org/presentationml/2006/main">
-  <p:tag name="KSO_WM_DIAGRAM_VIRTUALLY_FRAME" val="{&quot;height&quot;:278.7,&quot;left&quot;:17.3,&quot;top&quot;:233.35,&quot;width&quot;:679.6}"/>
-</p:tagLst>
-</file>
-
-<file path=ppt/tags/tag6.xml><?xml version="1.0" encoding="utf-8"?>
-<p:tagLst xmlns:p="http://schemas.openxmlformats.org/presentationml/2006/main">
-  <p:tag name="KSO_WM_DIAGRAM_VIRTUALLY_FRAME" val="{&quot;height&quot;:278.7,&quot;left&quot;:17.3,&quot;top&quot;:233.35,&quot;width&quot;:679.6}"/>
-</p:tagLst>
-</file>
-
-<file path=ppt/tags/tag7.xml><?xml version="1.0" encoding="utf-8"?>
-<p:tagLst xmlns:p="http://schemas.openxmlformats.org/presentationml/2006/main">
-  <p:tag name="KSO_WM_DIAGRAM_VIRTUALLY_FRAME" val="{&quot;height&quot;:278.7,&quot;left&quot;:17.3,&quot;top&quot;:233.35,&quot;width&quot;:679.6}"/>
-</p:tagLst>
-</file>
-
-<file path=ppt/tags/tag8.xml><?xml version="1.0" encoding="utf-8"?>
-<p:tagLst xmlns:p="http://schemas.openxmlformats.org/presentationml/2006/main">
-  <p:tag name="KSO_WM_DIAGRAM_VIRTUALLY_FRAME" val="{&quot;height&quot;:275.65,&quot;left&quot;:17.5,&quot;top&quot;:193.7,&quot;width&quot;:687.2}"/>
-</p:tagLst>
-</file>
-
-<file path=ppt/tags/tag9.xml><?xml version="1.0" encoding="utf-8"?>
-<p:tagLst xmlns:p="http://schemas.openxmlformats.org/presentationml/2006/main">
-  <p:tag name="KSO_WM_DIAGRAM_VIRTUALLY_FRAME" val="{&quot;height&quot;:278.7,&quot;left&quot;:17.3,&quot;top&quot;:233.35,&quot;width&quot;:679.6}"/>
-</p:tagLst>
+<file path=ppt/slides/slide5.xml><?xml version="1.0" encoding="utf-8"?>
+<p:sld xmlns:a="http://schemas.openxmlformats.org/drawingml/2006/main" xmlns:r="http://schemas.openxmlformats.org/officeDocument/2006/relationships" xmlns:p="http://schemas.openxmlformats.org/presentationml/2006/main">
+  <p:cSld>
+    <p:spTree>
+      <p:nvGrpSpPr>
+        <p:cNvPr id="1" name=""/>
+        <p:cNvGrpSpPr/>
+        <p:nvPr/>
+      </p:nvGrpSpPr>
+      <p:grpSpPr/>
+      <p:sp>
+        <p:nvSpPr>
+          <p:cNvPr id="6" name="文本框 5"/>
+          <p:cNvSpPr>
+            <a:spLocks noGrp="1"/>
+          </p:cNvSpPr>
+          <p:nvPr/>
+        </p:nvSpPr>
+        <p:spPr>
+          <a:xfrm>
+            <a:off x="275590" y="226695"/>
+            <a:ext cx="8522970" cy="1076325"/>
+          </a:xfrm>
+          <a:prstGeom prst="rect">
+            <a:avLst/>
+          </a:prstGeom>
+          <a:noFill/>
+        </p:spPr>
+        <p:txBody>
+          <a:bodyPr wrap="square">
+            <a:spAutoFit/>
+          </a:bodyPr>
+          <a:lstStyle/>
+          <a:p>
+            <a:r>
+              <a:rPr lang="en-US" altLang="zh-CN" sz="3200" b="1">
+                <a:latin typeface="Times New Roman" panose="02020603050405020304"/>
+                <a:ea typeface="Times New Roman" panose="02020603050405020304"/>
+                <a:cs typeface="Times New Roman" panose="02020603050405020304"/>
+              </a:rPr>
+              <a:t>Performance Comparison Before and After Optimization</a:t>
+            </a:r>
+            <a:endParaRPr lang="en-US" altLang="zh-CN" sz="3200" b="1">
+              <a:latin typeface="Times New Roman" panose="02020603050405020304"/>
+              <a:ea typeface="Times New Roman" panose="02020603050405020304"/>
+              <a:cs typeface="Times New Roman" panose="02020603050405020304"/>
+            </a:endParaRPr>
+          </a:p>
+        </p:txBody>
+      </p:sp>
+      <p:pic>
+        <p:nvPicPr>
+          <p:cNvPr id="2" name="图片 1" descr="generalization_model_comparison"/>
+          <p:cNvPicPr>
+            <a:picLocks noChangeAspect="1"/>
+          </p:cNvPicPr>
+          <p:nvPr/>
+        </p:nvPicPr>
+        <p:blipFill>
+          <a:blip r:embed="rId1"/>
+          <a:stretch>
+            <a:fillRect/>
+          </a:stretch>
+        </p:blipFill>
+        <p:spPr>
+          <a:xfrm>
+            <a:off x="4660265" y="1871980"/>
+            <a:ext cx="4399915" cy="3515995"/>
+          </a:xfrm>
+          <a:prstGeom prst="rect">
+            <a:avLst/>
+          </a:prstGeom>
+        </p:spPr>
+      </p:pic>
+      <p:pic>
+        <p:nvPicPr>
+          <p:cNvPr id="5" name="图片 4" descr="generalization_model_comparison"/>
+          <p:cNvPicPr>
+            <a:picLocks noChangeAspect="1"/>
+          </p:cNvPicPr>
+          <p:nvPr/>
+        </p:nvPicPr>
+        <p:blipFill>
+          <a:blip r:embed="rId2"/>
+          <a:stretch>
+            <a:fillRect/>
+          </a:stretch>
+        </p:blipFill>
+        <p:spPr>
+          <a:xfrm>
+            <a:off x="0" y="1872615"/>
+            <a:ext cx="4399915" cy="3515360"/>
+          </a:xfrm>
+          <a:prstGeom prst="rect">
+            <a:avLst/>
+          </a:prstGeom>
+        </p:spPr>
+      </p:pic>
+      <p:sp>
+        <p:nvSpPr>
+          <p:cNvPr id="7" name="文本框 6"/>
+          <p:cNvSpPr txBox="1"/>
+          <p:nvPr/>
+        </p:nvSpPr>
+        <p:spPr>
+          <a:xfrm>
+            <a:off x="-635" y="5298440"/>
+            <a:ext cx="4786630" cy="275590"/>
+          </a:xfrm>
+          <a:prstGeom prst="rect">
+            <a:avLst/>
+          </a:prstGeom>
+        </p:spPr>
+        <p:txBody>
+          <a:bodyPr wrap="square">
+            <a:spAutoFit/>
+          </a:bodyPr>
+          <a:p>
+            <a:pPr algn="ctr"/>
+            <a:r>
+              <a:rPr lang="en-US" altLang="zh-CN" sz="1200"/>
+              <a:t>Overall Generalization Performance Comparison Before Optimization</a:t>
+            </a:r>
+            <a:endParaRPr lang="en-US" altLang="zh-CN" sz="1200"/>
+          </a:p>
+        </p:txBody>
+      </p:sp>
+      <p:sp>
+        <p:nvSpPr>
+          <p:cNvPr id="8" name="文本框 7"/>
+          <p:cNvSpPr txBox="1"/>
+          <p:nvPr/>
+        </p:nvSpPr>
+        <p:spPr>
+          <a:xfrm>
+            <a:off x="4714240" y="5298440"/>
+            <a:ext cx="4511675" cy="275590"/>
+          </a:xfrm>
+          <a:prstGeom prst="rect">
+            <a:avLst/>
+          </a:prstGeom>
+        </p:spPr>
+        <p:txBody>
+          <a:bodyPr wrap="square">
+            <a:spAutoFit/>
+          </a:bodyPr>
+          <a:p>
+            <a:pPr algn="ctr"/>
+            <a:r>
+              <a:rPr lang="en-US" altLang="zh-CN" sz="1200">
+                <a:sym typeface="+mn-ea"/>
+              </a:rPr>
+              <a:t>Overall Generalization Performance Co</a:t>
+            </a:r>
+            <a:r>
+              <a:rPr lang="en-US" altLang="zh-CN" sz="1200"/>
+              <a:t>mparison After Opt</a:t>
+            </a:r>
+            <a:r>
+              <a:rPr lang="en-US" altLang="zh-CN" sz="1200">
+                <a:sym typeface="+mn-ea"/>
+              </a:rPr>
+              <a:t>imization</a:t>
+            </a:r>
+            <a:endParaRPr lang="en-US" altLang="zh-CN" sz="1200"/>
+          </a:p>
+        </p:txBody>
+      </p:sp>
+    </p:spTree>
+  </p:cSld>
+  <p:clrMapOvr>
+    <a:masterClrMapping/>
+  </p:clrMapOvr>
+  <p:timing>
+    <p:tnLst>
+      <p:par>
+        <p:cTn id="1" dur="indefinite" restart="never" nodeType="tmRoot"/>
+      </p:par>
+    </p:tnLst>
+  </p:timing>
+</p:sld>
 </file>
 
 <file path=ppt/theme/theme1.xml><?xml version="1.0" encoding="utf-8"?>
